--- a/examples/pm6_stylebase/stylebase_guide.pptx
+++ b/examples/pm6_stylebase/stylebase_guide.pptx
@@ -588,9 +588,7 @@
               <a:t>NOTE_CONTENT_FORMAT: 1.0</a:t>
             </a:r>
           </a:p>
-          <a:p>
-            <a:endParaRPr/>
-          </a:p>
+          <a:p/>
           <a:p>
             <a:r>
               <a:t>===BLOCK===</a:t>
@@ -601,9 +599,7 @@
               <a:t>{{BLOCK:IMAGE}}</a:t>
             </a:r>
           </a:p>
-          <a:p>
-            <a:endParaRPr/>
-          </a:p>
+          <a:p/>
           <a:p>
             <a:r>
               <a:t>export-image-mode: slide_with_rectpct</a:t>
@@ -619,45 +615,34 @@
               <a:t>export-image: extracted/figures/&lt;__BASEFILENAME__&gt;_slide&lt;__SLIDENUM__&gt;_fig.png</a:t>
             </a:r>
           </a:p>
-          <a:p>
-            <a:endParaRPr lang="en-US"/>
-          </a:p>
-          <a:p>
-            <a:r>
-              <a:rPr lang="en-US"/>
+          <a:p/>
+          <a:p>
+            <a:r>
               <a:t>===BLOCK===</a:t>
             </a:r>
           </a:p>
           <a:p>
             <a:r>
-              <a:rPr lang="en-US"/>
               <a:t>{{BLOCK:IMAGE}}</a:t>
             </a:r>
           </a:p>
-          <a:p>
-            <a:endParaRPr lang="en-US"/>
-          </a:p>
-          <a:p>
-            <a:r>
-              <a:rPr lang="en-US"/>
+          <a:p/>
+          <a:p>
+            <a:r>
               <a:t>export-image-mode: slide_with_rectpct</a:t>
             </a:r>
           </a:p>
           <a:p>
             <a:r>
-              <a:rPr lang="en-US"/>
               <a:t>export-image-target: keyvisual</a:t>
             </a:r>
           </a:p>
           <a:p>
             <a:r>
-              <a:rPr lang="en-US"/>
               <a:t>export-image: extracted/figures/&lt;__BASEFILENAME__&gt;_keyvisual.png</a:t>
             </a:r>
           </a:p>
-          <a:p>
-            <a:endParaRPr/>
-          </a:p>
+          <a:p/>
           <a:p>
             <a:r>
               <a:t>===BLOCK===</a:t>
@@ -668,9 +653,7 @@
               <a:t>{{BLOCK:MD:LONG}}</a:t>
             </a:r>
           </a:p>
-          <a:p>
-            <a:endParaRPr/>
-          </a:p>
+          <a:p/>
           <a:p>
             <a:r>
               <a:t>export-note: extracted/&lt;__BASEFILENAME__&gt;_slide&lt;__SLIDENUM__&gt;_md.md</a:t>
@@ -686,81 +669,48 @@
               <a:t>## &lt;__TITLE__&gt;</a:t>
             </a:r>
           </a:p>
-          <a:p>
-            <a:endParaRPr/>
-          </a:p>
+          <a:p/>
           <a:p>
             <a:r>
               <a:t>pptxをマージする際、基準とするスタイルをコンテンツとは別に指定することができます。</a:t>
             </a:r>
           </a:p>
-          <a:p>
-            <a:endParaRPr/>
-          </a:p>
-          <a:p>
-            <a:endParaRPr/>
-          </a:p>
-          <a:p>
-            <a:r>
-              <a:t>```{=latex}</a:t>
-            </a:r>
-          </a:p>
-          <a:p>
-            <a:r>
-              <a:t>\par\vspace{1\baselineskip}</a:t>
-            </a:r>
-          </a:p>
-          <a:p>
-            <a:r>
-              <a:t>\begin{center}</a:t>
-            </a:r>
-          </a:p>
-          <a:p>
-            <a:r>
-              <a:t>```</a:t>
-            </a:r>
-          </a:p>
-          <a:p>
-            <a:endParaRPr/>
-          </a:p>
+          <a:p/>
+          <a:p/>
+          <a:p>
+            <a:r>
+              <a:t>{{vspace:1}}</a:t>
+            </a:r>
+          </a:p>
+          <a:p/>
+          <a:p>
+            <a:r>
+              <a:t>::: {.center}</a:t>
+            </a:r>
+          </a:p>
+          <a:p/>
           <a:p>
             <a:r>
               <a:t>![](figures/&lt;__BASEFILENAME__&gt;_slide&lt;__SLIDENUM__&gt;_fig.png){ width=95% }</a:t>
             </a:r>
           </a:p>
-          <a:p>
-            <a:endParaRPr lang="en-US"/>
-          </a:p>
-          <a:p>
-            <a:r>
-              <a:rPr lang="en-US"/>
+          <a:p/>
+          <a:p>
+            <a:r>
               <a:t>![](figures/&lt;__BASEFILENAME__&gt;_keyvisual.png){ width=80% }</a:t>
             </a:r>
           </a:p>
-          <a:p>
-            <a:endParaRPr lang="en-US"/>
-          </a:p>
-          <a:p>
-            <a:endParaRPr/>
-          </a:p>
-          <a:p>
-            <a:r>
-              <a:t>```{=latex}</a:t>
-            </a:r>
-          </a:p>
-          <a:p>
-            <a:r>
-              <a:t>\end{center}</a:t>
-            </a:r>
-          </a:p>
-          <a:p>
-            <a:r>
-              <a:t>\par\vspace{1\baselineskip}</a:t>
-            </a:r>
-          </a:p>
-          <a:p>
-            <a:r>
-              <a:t>```</a:t>
+          <a:p/>
+          <a:p/>
+          <a:p>
+            <a:r>
+              <a:t>:::</a:t>
+            </a:r>
+          </a:p>
+          <a:p/>
+          <a:p>
+            <a:r>
+              <a:t>{{vspace:1}}</a:t>
             </a:r>
           </a:p>
         </p:txBody>
@@ -867,9 +817,7 @@
               <a:t>NOTE_CONTENT_FORMAT: 1.0</a:t>
             </a:r>
           </a:p>
-          <a:p>
-            <a:endParaRPr/>
-          </a:p>
+          <a:p/>
           <a:p>
             <a:r>
               <a:t>===BLOCK===</a:t>
@@ -880,9 +828,7 @@
               <a:t>{{BLOCK:IMAGE}}</a:t>
             </a:r>
           </a:p>
-          <a:p>
-            <a:endParaRPr/>
-          </a:p>
+          <a:p/>
           <a:p>
             <a:r>
               <a:t>export-image-mode: slide_with_rectpct</a:t>
@@ -898,9 +844,7 @@
               <a:t>export-image: extracted/figures/&lt;__BASEFILENAME__&gt;_slide&lt;__SLIDENUM__&gt;_fig.png</a:t>
             </a:r>
           </a:p>
-          <a:p>
-            <a:endParaRPr/>
-          </a:p>
+          <a:p/>
           <a:p>
             <a:r>
               <a:t>===BLOCK===</a:t>
@@ -911,9 +855,7 @@
               <a:t>{{BLOCK:MD:LONG}}</a:t>
             </a:r>
           </a:p>
-          <a:p>
-            <a:endParaRPr/>
-          </a:p>
+          <a:p/>
           <a:p>
             <a:r>
               <a:t>export-note: extracted/&lt;__BASEFILENAME__&gt;_slide&lt;__SLIDENUM__&gt;_md.md</a:t>
@@ -929,9 +871,7 @@
               <a:t>## &lt;__TITLE__&gt;</a:t>
             </a:r>
           </a:p>
-          <a:p>
-            <a:endParaRPr/>
-          </a:p>
+          <a:p/>
           <a:p>
             <a:r>
               <a:t>一般に、pptxファイルにはスタイル情報とコンテンツが含まれており、複数のファイルの</a:t>
@@ -942,87 +882,55 @@
               <a:t>マージ処理(pptmerge)では　「コンテンツ」 を結合します。</a:t>
             </a:r>
           </a:p>
-          <a:p>
-            <a:endParaRPr/>
-          </a:p>
+          <a:p/>
           <a:p>
             <a:r>
               <a:t>スタイル情報は最初のファイルのものだけが使われます。</a:t>
             </a:r>
           </a:p>
-          <a:p>
-            <a:endParaRPr/>
-          </a:p>
-          <a:p>
-            <a:r>
-              <a:t>```{=latex}</a:t>
-            </a:r>
-          </a:p>
-          <a:p>
-            <a:r>
-              <a:t>\par\vspace{1\baselineskip}</a:t>
-            </a:r>
-          </a:p>
-          <a:p>
-            <a:r>
-              <a:t>\begin{center}</a:t>
-            </a:r>
-          </a:p>
-          <a:p>
-            <a:r>
-              <a:t>```</a:t>
-            </a:r>
-          </a:p>
-          <a:p>
-            <a:endParaRPr/>
-          </a:p>
+          <a:p/>
+          <a:p>
+            <a:r>
+              <a:t>{{vspace:1}}</a:t>
+            </a:r>
+          </a:p>
+          <a:p/>
+          <a:p>
+            <a:r>
+              <a:t>::: {.center}</a:t>
+            </a:r>
+          </a:p>
+          <a:p/>
           <a:p>
             <a:r>
               <a:t>![](figures/&lt;__BASEFILENAME__&gt;_slide&lt;__SLIDENUM__&gt;_fig.png){ width=95% }</a:t>
             </a:r>
           </a:p>
-          <a:p>
-            <a:endParaRPr/>
-          </a:p>
-          <a:p>
-            <a:r>
-              <a:t>```{=latex}</a:t>
-            </a:r>
-          </a:p>
-          <a:p>
-            <a:r>
-              <a:t>\end{center}</a:t>
-            </a:r>
-          </a:p>
-          <a:p>
-            <a:r>
-              <a:t>\par\vspace{1\baselineskip}</a:t>
-            </a:r>
-          </a:p>
-          <a:p>
-            <a:r>
-              <a:t>```</a:t>
-            </a:r>
-          </a:p>
-          <a:p>
-            <a:endParaRPr/>
-          </a:p>
+          <a:p/>
+          <a:p>
+            <a:r>
+              <a:t>:::</a:t>
+            </a:r>
+          </a:p>
+          <a:p/>
+          <a:p>
+            <a:r>
+              <a:t>{{vspace:1}}</a:t>
+            </a:r>
+          </a:p>
+          <a:p/>
           <a:p>
             <a:r>
               <a:t>しかし、コンテンツファイルは一般に頻繁に更新されるものです。</a:t>
             </a:r>
           </a:p>
-          <a:p>
-            <a:endParaRPr/>
-          </a:p>
+          <a:p/>
           <a:p>
             <a:r>
               <a:t>コンテンツとスタイルを混在させていると　 **「うっかり、スタイルまで更新してしまう」** 　事態が起きます。　</a:t>
             </a:r>
           </a:p>
-          <a:p>
-            <a:endParaRPr/>
-          </a:p>
+          <a:p/>
           <a:p>
             <a:r>
               <a:t>スタイルが合わないとレイアウト崩れ、配色崩れなどが起きるため、スタイル情報はコンテンツとは別に管理することが望ましいのです。</a:t>
@@ -1138,9 +1046,7 @@
               <a:t>NOTE_CONTENT_FORMAT: 1.0</a:t>
             </a:r>
           </a:p>
-          <a:p>
-            <a:endParaRPr/>
-          </a:p>
+          <a:p/>
           <a:p>
             <a:r>
               <a:t>===BLOCK===</a:t>
@@ -1151,9 +1057,7 @@
               <a:t>{{BLOCK:IMAGE}}</a:t>
             </a:r>
           </a:p>
-          <a:p>
-            <a:endParaRPr/>
-          </a:p>
+          <a:p/>
           <a:p>
             <a:r>
               <a:t>export-image-mode: slide_with_rectpct</a:t>
@@ -1169,9 +1073,7 @@
               <a:t>export-image: extracted/figures/&lt;__BASEFILENAME__&gt;_slide&lt;__SLIDENUM__&gt;_fig.png</a:t>
             </a:r>
           </a:p>
-          <a:p>
-            <a:endParaRPr/>
-          </a:p>
+          <a:p/>
           <a:p>
             <a:r>
               <a:t>===BLOCK===</a:t>
@@ -1182,9 +1084,7 @@
               <a:t>{{BLOCK:MD:LONG}}</a:t>
             </a:r>
           </a:p>
-          <a:p>
-            <a:endParaRPr/>
-          </a:p>
+          <a:p/>
           <a:p>
             <a:r>
               <a:t>export-note: extracted/&lt;__BASEFILENAME__&gt;_slide&lt;__SLIDENUM__&gt;_md.md</a:t>
@@ -1200,74 +1100,46 @@
               <a:t>## &lt;__TITLE__&gt;</a:t>
             </a:r>
           </a:p>
-          <a:p>
-            <a:endParaRPr/>
-          </a:p>
+          <a:p/>
           <a:p>
             <a:r>
               <a:t>そこで、スタイル情報を別のファイルに分離することを推奨します。　</a:t>
             </a:r>
           </a:p>
-          <a:p>
-            <a:endParaRPr/>
-          </a:p>
+          <a:p/>
           <a:p>
             <a:r>
               <a:t>スタイル情報は一般に、複数の文書、複数のプロジェクトで共通に使われるものなので、共通資材フォルダに置くとよいでしょう。</a:t>
             </a:r>
           </a:p>
-          <a:p>
-            <a:endParaRPr/>
-          </a:p>
-          <a:p>
-            <a:r>
-              <a:t>```{=latex}</a:t>
-            </a:r>
-          </a:p>
-          <a:p>
-            <a:r>
-              <a:t>\par\vspace{1\baselineskip}</a:t>
-            </a:r>
-          </a:p>
-          <a:p>
-            <a:r>
-              <a:t>\begin{center}</a:t>
-            </a:r>
-          </a:p>
-          <a:p>
-            <a:r>
-              <a:t>```</a:t>
-            </a:r>
-          </a:p>
-          <a:p>
-            <a:endParaRPr/>
-          </a:p>
+          <a:p/>
+          <a:p>
+            <a:r>
+              <a:t>{{vspace:1}}</a:t>
+            </a:r>
+          </a:p>
+          <a:p/>
+          <a:p>
+            <a:r>
+              <a:t>::: {.center}</a:t>
+            </a:r>
+          </a:p>
+          <a:p/>
           <a:p>
             <a:r>
               <a:t>![](figures/&lt;__BASEFILENAME__&gt;_slide&lt;__SLIDENUM__&gt;_fig.png){ width=95% }</a:t>
             </a:r>
           </a:p>
-          <a:p>
-            <a:endParaRPr/>
-          </a:p>
-          <a:p>
-            <a:r>
-              <a:t>```{=latex}</a:t>
-            </a:r>
-          </a:p>
-          <a:p>
-            <a:r>
-              <a:t>\end{center}</a:t>
-            </a:r>
-          </a:p>
-          <a:p>
-            <a:r>
-              <a:t>\par\vspace{1\baselineskip}</a:t>
-            </a:r>
-          </a:p>
-          <a:p>
-            <a:r>
-              <a:t>```</a:t>
+          <a:p/>
+          <a:p>
+            <a:r>
+              <a:t>:::</a:t>
+            </a:r>
+          </a:p>
+          <a:p/>
+          <a:p>
+            <a:r>
+              <a:t>{{vspace:1}}</a:t>
             </a:r>
           </a:p>
         </p:txBody>
@@ -1380,9 +1252,7 @@
               <a:t>NOTE_CONTENT_FORMAT: 1.0</a:t>
             </a:r>
           </a:p>
-          <a:p>
-            <a:endParaRPr/>
-          </a:p>
+          <a:p/>
           <a:p>
             <a:r>
               <a:t>===BLOCK===</a:t>
@@ -1393,9 +1263,7 @@
               <a:t>{{BLOCK:IMAGE}}</a:t>
             </a:r>
           </a:p>
-          <a:p>
-            <a:endParaRPr/>
-          </a:p>
+          <a:p/>
           <a:p>
             <a:r>
               <a:t>export-image-mode: slide_with_rectpct</a:t>
@@ -1411,9 +1279,7 @@
               <a:t>export-image: extracted/figures/&lt;__BASEFILENAME__&gt;_slide&lt;__SLIDENUM__&gt;_fig.png</a:t>
             </a:r>
           </a:p>
-          <a:p>
-            <a:endParaRPr/>
-          </a:p>
+          <a:p/>
           <a:p>
             <a:r>
               <a:t>===BLOCK===</a:t>
@@ -1424,9 +1290,7 @@
               <a:t>{{BLOCK:MD:LONG}}</a:t>
             </a:r>
           </a:p>
-          <a:p>
-            <a:endParaRPr/>
-          </a:p>
+          <a:p/>
           <a:p>
             <a:r>
               <a:t>export-note: extracted/&lt;__BASEFILENAME__&gt;_slide&lt;__SLIDENUM__&gt;_md.md</a:t>
@@ -1442,74 +1306,46 @@
               <a:t>## &lt;__TITLE__&gt;</a:t>
             </a:r>
           </a:p>
-          <a:p>
-            <a:endParaRPr/>
-          </a:p>
+          <a:p/>
           <a:p>
             <a:r>
               <a:t>サンプルファイルとして、マージによってスタイルが変わる例を格納してあります。</a:t>
             </a:r>
           </a:p>
-          <a:p>
-            <a:endParaRPr/>
-          </a:p>
+          <a:p/>
           <a:p>
             <a:r>
               <a:t>different_style_sample.pptx は simple_stylebase.pptx とは違うスタイルで作られていますが、マージ後の stylebase_merged.pptx を見ると simple_stylebase.pptx のスタイルに変更されています。</a:t>
             </a:r>
           </a:p>
-          <a:p>
-            <a:endParaRPr/>
-          </a:p>
-          <a:p>
-            <a:r>
-              <a:t>```{=latex}</a:t>
-            </a:r>
-          </a:p>
-          <a:p>
-            <a:r>
-              <a:t>\par\vspace{1\baselineskip}</a:t>
-            </a:r>
-          </a:p>
-          <a:p>
-            <a:r>
-              <a:t>\begin{center}</a:t>
-            </a:r>
-          </a:p>
-          <a:p>
-            <a:r>
-              <a:t>```</a:t>
-            </a:r>
-          </a:p>
-          <a:p>
-            <a:endParaRPr/>
-          </a:p>
+          <a:p/>
+          <a:p>
+            <a:r>
+              <a:t>{{vspace:1}}</a:t>
+            </a:r>
+          </a:p>
+          <a:p/>
+          <a:p>
+            <a:r>
+              <a:t>::: {.center}</a:t>
+            </a:r>
+          </a:p>
+          <a:p/>
           <a:p>
             <a:r>
               <a:t>![](figures/&lt;__BASEFILENAME__&gt;_slide&lt;__SLIDENUM__&gt;_fig.png){ width=95% }</a:t>
             </a:r>
           </a:p>
-          <a:p>
-            <a:endParaRPr/>
-          </a:p>
-          <a:p>
-            <a:r>
-              <a:t>```{=latex}</a:t>
-            </a:r>
-          </a:p>
-          <a:p>
-            <a:r>
-              <a:t>\end{center}</a:t>
-            </a:r>
-          </a:p>
-          <a:p>
-            <a:r>
-              <a:t>\par\vspace{1\baselineskip}</a:t>
-            </a:r>
-          </a:p>
-          <a:p>
-            <a:r>
-              <a:t>```</a:t>
+          <a:p/>
+          <a:p>
+            <a:r>
+              <a:t>:::</a:t>
+            </a:r>
+          </a:p>
+          <a:p/>
+          <a:p>
+            <a:r>
+              <a:t>{{vspace:1}}</a:t>
             </a:r>
           </a:p>
         </p:txBody>
